--- a/Presentation/Assignment1_Presentation.pptx
+++ b/Presentation/Assignment1_Presentation.pptx
@@ -212,7 +212,7 @@
           <a:p>
             <a:fld id="{A8ADFD5B-A66C-449C-B6E8-FB716D07777D}" type="datetimeFigureOut">
               <a:pPr/>
-              <a:t>2026/3/22</a:t>
+              <a:t>3/25/26</a:t>
             </a:fld>
             <a:endParaRPr lang="zh-CN"/>
           </a:p>
@@ -523,7 +523,65 @@
           <a:bodyPr/>
           <a:lstStyle/>
           <a:p>
-            <a:endParaRPr lang="zh-CN"/>
+            <a:r>
+              <a:rPr lang="en-US" altLang="zh-CN" dirty="0"/>
+              <a:t>Hello everyone. In this presentation, we </a:t>
+            </a:r>
+            <a:r>
+              <a:rPr lang="en-US" altLang="zh-CN" dirty="0" err="1"/>
+              <a:t>analyse</a:t>
+            </a:r>
+            <a:r>
+              <a:rPr lang="en-US" altLang="zh-CN" dirty="0"/>
+              <a:t> the provided Android APK, a1_case1.apk, to identify a vulnerability</a:t>
+            </a:r>
+          </a:p>
+          <a:p>
+            <a:r>
+              <a:rPr lang="en-US" altLang="zh-CN" dirty="0"/>
+              <a:t>  related to security-sensitive randomness. Since an APK is a packaged Android application, we first decompiled it to</a:t>
+            </a:r>
+          </a:p>
+          <a:p>
+            <a:r>
+              <a:rPr lang="en-US" altLang="zh-CN" dirty="0"/>
+              <a:t>  inspect its manifest, activities, and Java logic. Our goal was to understand how the app handles authentication, what</a:t>
+            </a:r>
+          </a:p>
+          <a:p>
+            <a:r>
+              <a:rPr lang="en-US" altLang="zh-CN" dirty="0"/>
+              <a:t>  assets it protects, and whether any random-looking values are actually generated in an insecure way.</a:t>
+            </a:r>
+          </a:p>
+          <a:p>
+            <a:r>
+              <a:rPr lang="en-US" altLang="zh-CN" dirty="0"/>
+              <a:t>  From static analysis and the app demo, we found that the application performs registration, login, and profile access</a:t>
+            </a:r>
+          </a:p>
+          <a:p>
+            <a:r>
+              <a:rPr lang="en-US" altLang="zh-CN" dirty="0"/>
+              <a:t>  entirely on the device, with no backend service. The key issue we focus on is that the app generates a session token</a:t>
+            </a:r>
+          </a:p>
+          <a:p>
+            <a:r>
+              <a:rPr lang="en-US" altLang="zh-CN" dirty="0"/>
+              <a:t>  using </a:t>
+            </a:r>
+            <a:r>
+              <a:rPr lang="en-US" altLang="zh-CN" dirty="0" err="1"/>
+              <a:t>java.util.Random</a:t>
+            </a:r>
+            <a:r>
+              <a:rPr lang="en-US" altLang="zh-CN" dirty="0"/>
+              <a:t>, which is not suitable for security-sensitive authentication data.</a:t>
+            </a:r>
+          </a:p>
+          <a:p>
+            <a:endParaRPr lang="zh-CN" dirty="0"/>
           </a:p>
         </p:txBody>
       </p:sp>
@@ -603,7 +661,69 @@
           <a:bodyPr/>
           <a:lstStyle/>
           <a:p>
-            <a:endParaRPr lang="zh-CN"/>
+            <a:r>
+              <a:rPr lang="en-US" altLang="zh-CN" dirty="0"/>
+              <a:t> Our system model has five main elements. First, </a:t>
+            </a:r>
+            <a:r>
+              <a:rPr lang="en-US" altLang="zh-CN" dirty="0" err="1"/>
+              <a:t>MainActivity</a:t>
+            </a:r>
+            <a:r>
+              <a:rPr lang="en-US" altLang="zh-CN" dirty="0"/>
+              <a:t> collects a username and password during registration.</a:t>
+            </a:r>
+          </a:p>
+          <a:p>
+            <a:r>
+              <a:rPr lang="en-US" altLang="zh-CN" dirty="0"/>
+              <a:t>  Second, the Login activity reads stored credentials, checks the user’s input, and generates a session token after</a:t>
+            </a:r>
+          </a:p>
+          <a:p>
+            <a:r>
+              <a:rPr lang="en-US" altLang="zh-CN" dirty="0"/>
+              <a:t>  successful login. Third, the Profile activity represents the authenticated area of the app. Fourth, local file storage</a:t>
+            </a:r>
+          </a:p>
+          <a:p>
+            <a:r>
+              <a:rPr lang="en-US" altLang="zh-CN" dirty="0"/>
+              <a:t>  stores the saved credentials. Fifth, </a:t>
+            </a:r>
+            <a:r>
+              <a:rPr lang="en-US" altLang="zh-CN" dirty="0" err="1"/>
+              <a:t>SharedPreferences</a:t>
+            </a:r>
+            <a:r>
+              <a:rPr lang="en-US" altLang="zh-CN" dirty="0"/>
+              <a:t> stores the session token.</a:t>
+            </a:r>
+          </a:p>
+          <a:p>
+            <a:r>
+              <a:rPr lang="en-US" altLang="zh-CN" dirty="0"/>
+              <a:t>  The important protected assets are the user credentials, the session token, and the integrity of the app’s local</a:t>
+            </a:r>
+          </a:p>
+          <a:p>
+            <a:r>
+              <a:rPr lang="en-US" altLang="zh-CN" dirty="0"/>
+              <a:t>  authentication state. The main data flow is: the user enters credentials, the app stores and later reads them for</a:t>
+            </a:r>
+          </a:p>
+          <a:p>
+            <a:r>
+              <a:rPr lang="en-US" altLang="zh-CN" dirty="0"/>
+              <a:t>  verification, then after login it creates a session token and stores that token locally. Because the entire trust</a:t>
+            </a:r>
+          </a:p>
+          <a:p>
+            <a:r>
+              <a:rPr lang="en-US" altLang="zh-CN" dirty="0"/>
+              <a:t>  decision happens on-device, the token becomes a critical security asset.</a:t>
+            </a:r>
+            <a:endParaRPr lang="zh-CN" dirty="0"/>
           </a:p>
         </p:txBody>
       </p:sp>
@@ -683,7 +803,77 @@
           <a:bodyPr/>
           <a:lstStyle/>
           <a:p>
-            <a:endParaRPr lang="zh-CN"/>
+            <a:r>
+              <a:rPr lang="en-US" altLang="zh-CN" dirty="0"/>
+              <a:t> Our attacker model is a realistic local attacker. This could be a user with a rooted device, a forensic examiner, or</a:t>
+            </a:r>
+          </a:p>
+          <a:p>
+            <a:r>
+              <a:rPr lang="en-US" altLang="zh-CN" dirty="0"/>
+              <a:t>  malware with elevated local privileges. This attacker can decompile the APK, inspect the code, observe when login</a:t>
+            </a:r>
+          </a:p>
+          <a:p>
+            <a:r>
+              <a:rPr lang="en-US" altLang="zh-CN" dirty="0"/>
+              <a:t>  happens, and read or modify locally stored application data.</a:t>
+            </a:r>
+          </a:p>
+          <a:p>
+            <a:r>
+              <a:rPr lang="en-US" altLang="zh-CN" dirty="0"/>
+              <a:t>  To find the vulnerability, we decompiled the APK and reviewed the manifest and authentication-related classes. We then</a:t>
+            </a:r>
+          </a:p>
+          <a:p>
+            <a:r>
+              <a:rPr lang="en-US" altLang="zh-CN" dirty="0"/>
+              <a:t>  searched for values treated as random, token, or session-related. This led us to the Login class, where we found a</a:t>
+            </a:r>
+          </a:p>
+          <a:p>
+            <a:r>
+              <a:rPr lang="en-US" altLang="zh-CN" dirty="0"/>
+              <a:t>  method called </a:t>
+            </a:r>
+            <a:r>
+              <a:rPr lang="en-US" altLang="zh-CN" dirty="0" err="1"/>
+              <a:t>generateSessionToken</a:t>
+            </a:r>
+            <a:r>
+              <a:rPr lang="en-US" altLang="zh-CN" dirty="0"/>
+              <a:t>(). The method creates a 16-character token, but it uses </a:t>
+            </a:r>
+            <a:r>
+              <a:rPr lang="en-US" altLang="zh-CN" dirty="0" err="1"/>
+              <a:t>java.util.Random</a:t>
+            </a:r>
+            <a:r>
+              <a:rPr lang="en-US" altLang="zh-CN" dirty="0"/>
+              <a:t>. We used</a:t>
+            </a:r>
+          </a:p>
+          <a:p>
+            <a:r>
+              <a:rPr lang="en-US" altLang="zh-CN" dirty="0"/>
+              <a:t>  this code-level evidence, along with the app demo and </a:t>
+            </a:r>
+            <a:r>
+              <a:rPr lang="en-US" altLang="zh-CN" dirty="0" err="1"/>
+              <a:t>adb</a:t>
+            </a:r>
+            <a:r>
+              <a:rPr lang="en-US" altLang="zh-CN" dirty="0"/>
+              <a:t>-related inspection workflow, to validate that the token is</a:t>
+            </a:r>
+          </a:p>
+          <a:p>
+            <a:r>
+              <a:rPr lang="en-US" altLang="zh-CN" dirty="0"/>
+              <a:t>  part of the app’s authenticated session logic and is therefore security-sensitive.</a:t>
+            </a:r>
+            <a:endParaRPr lang="zh-CN" dirty="0"/>
           </a:p>
         </p:txBody>
       </p:sp>
@@ -763,7 +953,67 @@
           <a:bodyPr/>
           <a:lstStyle/>
           <a:p>
-            <a:endParaRPr lang="zh-CN"/>
+            <a:r>
+              <a:rPr lang="en-US" altLang="zh-CN" dirty="0"/>
+              <a:t> The vulnerability is insecure session token generation using weak randomness. </a:t>
+            </a:r>
+            <a:r>
+              <a:rPr lang="en-US" altLang="zh-CN" dirty="0" err="1"/>
+              <a:t>java.util.Random</a:t>
+            </a:r>
+            <a:r>
+              <a:rPr lang="en-US" altLang="zh-CN" dirty="0"/>
+              <a:t> is a general-purpose</a:t>
+            </a:r>
+          </a:p>
+          <a:p>
+            <a:r>
+              <a:rPr lang="en-US" altLang="zh-CN" dirty="0"/>
+              <a:t>  pseudo-random generator, but it is not designed for cryptographic security. A session token should be hard to predict,</a:t>
+            </a:r>
+          </a:p>
+          <a:p>
+            <a:r>
+              <a:rPr lang="en-US" altLang="zh-CN" dirty="0"/>
+              <a:t>  because it represents authenticated state. If the token is predictable or reproducible, an attacker may be able to</a:t>
+            </a:r>
+          </a:p>
+          <a:p>
+            <a:r>
+              <a:rPr lang="en-US" altLang="zh-CN" dirty="0"/>
+              <a:t>  impersonate a logged-in user or tamper with session state.</a:t>
+            </a:r>
+          </a:p>
+          <a:p>
+            <a:r>
+              <a:rPr lang="en-US" altLang="zh-CN" dirty="0"/>
+              <a:t>  A realistic attack scenario is as follows. First, the attacker decompiles the APK and understands how the token is</a:t>
+            </a:r>
+          </a:p>
+          <a:p>
+            <a:r>
+              <a:rPr lang="en-US" altLang="zh-CN" dirty="0"/>
+              <a:t>  generated and stored. Second, the attacker gains local access to the device environment or observes the app’s</a:t>
+            </a:r>
+          </a:p>
+          <a:p>
+            <a:r>
+              <a:rPr lang="en-US" altLang="zh-CN" dirty="0"/>
+              <a:t>  authenticated state. Third, because the token comes from a non-cryptographic generator and is stored locally, the</a:t>
+            </a:r>
+          </a:p>
+          <a:p>
+            <a:r>
+              <a:rPr lang="en-US" altLang="zh-CN" dirty="0"/>
+              <a:t>  attacker may predict, recreate, or replace the token. Finally, the attacker uses that manipulated or predicted token</a:t>
+            </a:r>
+          </a:p>
+          <a:p>
+            <a:r>
+              <a:rPr lang="en-US" altLang="zh-CN" dirty="0"/>
+              <a:t>  to bypass the intended login protection and access the profile area as an authenticated user.</a:t>
+            </a:r>
+            <a:endParaRPr lang="zh-CN" dirty="0"/>
           </a:p>
         </p:txBody>
       </p:sp>
@@ -861,7 +1111,85 @@
           <a:bodyPr/>
           <a:lstStyle/>
           <a:p>
-            <a:endParaRPr lang="zh-CN"/>
+            <a:r>
+              <a:rPr lang="en-US" altLang="zh-CN" dirty="0"/>
+              <a:t> The concrete fix is to replace </a:t>
+            </a:r>
+            <a:r>
+              <a:rPr lang="en-US" altLang="zh-CN" dirty="0" err="1"/>
+              <a:t>java.util.Random</a:t>
+            </a:r>
+            <a:r>
+              <a:rPr lang="en-US" altLang="zh-CN" dirty="0"/>
+              <a:t> with </a:t>
+            </a:r>
+            <a:r>
+              <a:rPr lang="en-US" altLang="zh-CN" dirty="0" err="1"/>
+              <a:t>SecureRandom</a:t>
+            </a:r>
+            <a:r>
+              <a:rPr lang="en-US" altLang="zh-CN" dirty="0"/>
+              <a:t> when generating session tokens. </a:t>
+            </a:r>
+            <a:r>
+              <a:rPr lang="en-US" altLang="zh-CN" dirty="0" err="1"/>
+              <a:t>SecureRandom</a:t>
+            </a:r>
+            <a:r>
+              <a:rPr lang="en-US" altLang="zh-CN" dirty="0"/>
+              <a:t> is</a:t>
+            </a:r>
+          </a:p>
+          <a:p>
+            <a:r>
+              <a:rPr lang="en-US" altLang="zh-CN" dirty="0"/>
+              <a:t>  designed for cryptographic use and produces values that are much harder to predict. This directly addresses the core</a:t>
+            </a:r>
+          </a:p>
+          <a:p>
+            <a:r>
+              <a:rPr lang="en-US" altLang="zh-CN" dirty="0"/>
+              <a:t>  weakness because the session token is an authentication-related security value, not just a UI identifier.</a:t>
+            </a:r>
+          </a:p>
+          <a:p>
+            <a:r>
+              <a:rPr lang="en-US" altLang="zh-CN" dirty="0"/>
+              <a:t>  In addition, the app should avoid relying only on client-side local trust for session management, because storing</a:t>
+            </a:r>
+          </a:p>
+          <a:p>
+            <a:r>
+              <a:rPr lang="en-US" altLang="zh-CN" dirty="0"/>
+              <a:t>  authentication state locally increases attack exposure. For this assignment, however, the main technical mitigation is</a:t>
+            </a:r>
+          </a:p>
+          <a:p>
+            <a:r>
+              <a:rPr lang="en-US" altLang="zh-CN" dirty="0"/>
+              <a:t>  replacing the weak randomness source with a cryptographically strong one and ensuring the token remains unpredictable.</a:t>
+            </a:r>
+          </a:p>
+          <a:p>
+            <a:r>
+              <a:rPr lang="en-US" altLang="zh-CN" dirty="0"/>
+              <a:t>  Our key lesson is that not every random-looking value is safe. In security analysis, we must check both the generator</a:t>
+            </a:r>
+          </a:p>
+          <a:p>
+            <a:r>
+              <a:rPr lang="en-US" altLang="zh-CN" dirty="0"/>
+              <a:t>  and the role of the value. Here, the token looks random, but because it uses the wrong API for a security-sensitive</a:t>
+            </a:r>
+          </a:p>
+          <a:p>
+            <a:r>
+              <a:rPr lang="en-US" altLang="zh-CN" dirty="0"/>
+              <a:t>  purpose, it creates a real authentication risk.</a:t>
+            </a:r>
+          </a:p>
+          <a:p>
+            <a:endParaRPr lang="zh-CN" dirty="0"/>
           </a:p>
         </p:txBody>
       </p:sp>
@@ -1172,7 +1500,7 @@
                 </a:solidFill>
               </a:rPr>
               <a:pPr algn="ctr"/>
-              <a:t>2026/3/22</a:t>
+              <a:t>3/25/26</a:t>
             </a:fld>
             <a:endParaRPr lang="zh-CN" sz="2000">
               <a:solidFill>
@@ -1362,7 +1690,7 @@
           <a:p>
             <a:fld id="{E4606EA6-EFEA-4C30-9264-4F9291A5780D}" type="datetime1">
               <a:pPr/>
-              <a:t>2026/3/22</a:t>
+              <a:t>3/25/26</a:t>
             </a:fld>
             <a:endParaRPr lang="zh-CN"/>
           </a:p>
@@ -1776,7 +2104,7 @@
           <a:p>
             <a:fld id="{6FCF9F07-3BC7-4570-B054-79111B0A380C}" type="datetime1">
               <a:pPr/>
-              <a:t>2026/3/22</a:t>
+              <a:t>3/25/26</a:t>
             </a:fld>
             <a:endParaRPr lang="zh-CN"/>
           </a:p>
@@ -2026,7 +2354,7 @@
           <a:p>
             <a:fld id="{E4606EA6-EFEA-4C30-9264-4F9291A5780D}" type="datetime1">
               <a:pPr/>
-              <a:t>2026/3/22</a:t>
+              <a:t>3/25/26</a:t>
             </a:fld>
             <a:endParaRPr lang="zh-CN"/>
           </a:p>
@@ -2266,7 +2594,7 @@
           <a:p>
             <a:fld id="{E4606EA6-EFEA-4C30-9264-4F9291A5780D}" type="datetime1">
               <a:pPr/>
-              <a:t>2026/3/22</a:t>
+              <a:t>3/25/26</a:t>
             </a:fld>
             <a:endParaRPr lang="zh-CN"/>
           </a:p>
@@ -2468,7 +2796,7 @@
           <a:p>
             <a:fld id="{6DFADB5D-B7A0-47E3-AD2D-B1A6F8614213}" type="datetime1">
               <a:pPr/>
-              <a:t>2026/3/22</a:t>
+              <a:t>3/25/26</a:t>
             </a:fld>
             <a:endParaRPr lang="zh-CN"/>
           </a:p>
@@ -2576,7 +2904,7 @@
           <a:p>
             <a:fld id="{72968126-03FC-49C0-B9B8-2B561CCC3D90}" type="datetime1">
               <a:pPr/>
-              <a:t>2026/3/22</a:t>
+              <a:t>3/25/26</a:t>
             </a:fld>
             <a:endParaRPr lang="zh-CN"/>
           </a:p>
@@ -2722,7 +3050,7 @@
           <a:p>
             <a:fld id="{F49A8198-4617-485E-9585-4840B69DBBA6}" type="datetime1">
               <a:pPr/>
-              <a:t>2026/3/22</a:t>
+              <a:t>3/25/26</a:t>
             </a:fld>
             <a:endParaRPr lang="zh-CN"/>
           </a:p>
@@ -3289,7 +3617,7 @@
           <a:p>
             <a:fld id="{E4606EA6-EFEA-4C30-9264-4F9291A5780D}" type="datetime1">
               <a:pPr/>
-              <a:t>2026/3/22</a:t>
+              <a:t>3/25/26</a:t>
             </a:fld>
             <a:endParaRPr lang="zh-CN"/>
           </a:p>
@@ -3487,7 +3815,7 @@
           <a:p>
             <a:fld id="{E4606EA6-EFEA-4C30-9264-4F9291A5780D}" type="datetime1">
               <a:pPr/>
-              <a:t>2026/3/22</a:t>
+              <a:t>3/25/26</a:t>
             </a:fld>
             <a:endParaRPr lang="zh-CN" sz="1400">
               <a:solidFill>
@@ -4099,7 +4427,7 @@
             <a:pPr algn="ctr"/>
             <a:r>
               <a:rPr lang="en-US" sz="3000" b="1" dirty="0"/>
-              <a:t>Cryptographic Vulnerability Discovery in a1_case1.apk</a:t>
+              <a:t>Cryptographic Vulnerability Discovery</a:t>
             </a:r>
             <a:endParaRPr lang="en-US" sz="3000" dirty="0"/>
           </a:p>
@@ -4221,6 +4549,14 @@
   <p:clrMapOvr>
     <a:masterClrMapping/>
   </p:clrMapOvr>
+  <mc:AlternateContent xmlns:mc="http://schemas.openxmlformats.org/markup-compatibility/2006">
+    <mc:Choice xmlns:p14="http://schemas.microsoft.com/office/powerpoint/2010/main" Requires="p14">
+      <p:transition spd="slow" p14:dur="2000" advTm="5116"/>
+    </mc:Choice>
+    <mc:Fallback>
+      <p:transition spd="slow" advTm="5116"/>
+    </mc:Fallback>
+  </mc:AlternateContent>
 </p:sld>
 </file>
 
@@ -4275,7 +4611,7 @@
         <p:spPr>
           <a:xfrm>
             <a:off x="685800" y="1504950"/>
-            <a:ext cx="7772400" cy="3200400"/>
+            <a:ext cx="4876800" cy="3200400"/>
           </a:xfrm>
         </p:spPr>
         <p:txBody>
@@ -4346,6 +4682,42 @@
           </a:p>
         </p:txBody>
       </p:sp>
+      <p:pic>
+        <p:nvPicPr>
+          <p:cNvPr id="5" name="Picture 4">
+            <a:extLst>
+              <a:ext uri="{FF2B5EF4-FFF2-40B4-BE49-F238E27FC236}">
+                <a16:creationId xmlns:a16="http://schemas.microsoft.com/office/drawing/2014/main" id="{6089AF9B-D99A-723F-13D2-186E0F38FA15}"/>
+              </a:ext>
+            </a:extLst>
+          </p:cNvPr>
+          <p:cNvPicPr>
+            <a:picLocks noChangeAspect="1"/>
+          </p:cNvPicPr>
+          <p:nvPr/>
+        </p:nvPicPr>
+        <p:blipFill>
+          <a:blip r:embed="rId3">
+            <a:extLst>
+              <a:ext uri="{28A0092B-C50C-407E-A947-70E740481C1C}">
+                <a14:useLocalDpi xmlns:a14="http://schemas.microsoft.com/office/drawing/2010/main" val="0"/>
+              </a:ext>
+            </a:extLst>
+          </a:blip>
+          <a:stretch>
+            <a:fillRect/>
+          </a:stretch>
+        </p:blipFill>
+        <p:spPr>
+          <a:xfrm>
+            <a:off x="6141893" y="1352550"/>
+            <a:ext cx="2883552" cy="3790950"/>
+          </a:xfrm>
+          <a:prstGeom prst="rect">
+            <a:avLst/>
+          </a:prstGeom>
+        </p:spPr>
+      </p:pic>
     </p:spTree>
   </p:cSld>
   <p:clrMapOvr>
@@ -4405,7 +4777,7 @@
         <p:spPr>
           <a:xfrm>
             <a:off x="685800" y="1504950"/>
-            <a:ext cx="7772400" cy="3200400"/>
+            <a:ext cx="7467600" cy="3200400"/>
           </a:xfrm>
         </p:spPr>
         <p:txBody>
@@ -4460,6 +4832,96 @@
               <a:rPr lang="en-US" sz="1800" dirty="0"/>
               <a:t>() in the Login class</a:t>
             </a:r>
+          </a:p>
+        </p:txBody>
+      </p:sp>
+      <p:sp>
+        <p:nvSpPr>
+          <p:cNvPr id="6" name="AutoShape 2">
+            <a:extLst>
+              <a:ext uri="{FF2B5EF4-FFF2-40B4-BE49-F238E27FC236}">
+                <a16:creationId xmlns:a16="http://schemas.microsoft.com/office/drawing/2014/main" id="{C40369E9-B339-2F75-C2F8-F3A53922318B}"/>
+              </a:ext>
+            </a:extLst>
+          </p:cNvPr>
+          <p:cNvSpPr>
+            <a:spLocks noChangeAspect="1" noChangeArrowheads="1"/>
+          </p:cNvSpPr>
+          <p:nvPr/>
+        </p:nvSpPr>
+        <p:spPr bwMode="auto">
+          <a:xfrm>
+            <a:off x="4419600" y="2419350"/>
+            <a:ext cx="304800" cy="304800"/>
+          </a:xfrm>
+          <a:prstGeom prst="rect">
+            <a:avLst/>
+          </a:prstGeom>
+          <a:noFill/>
+          <a:extLst>
+            <a:ext uri="{909E8E84-426E-40DD-AFC4-6F175D3DCCD1}">
+              <a14:hiddenFill xmlns:a14="http://schemas.microsoft.com/office/drawing/2010/main">
+                <a:solidFill>
+                  <a:srgbClr val="FFFFFF"/>
+                </a:solidFill>
+              </a14:hiddenFill>
+            </a:ext>
+          </a:extLst>
+        </p:spPr>
+        <p:txBody>
+          <a:bodyPr vert="horz" wrap="square" lIns="91440" tIns="45720" rIns="91440" bIns="45720" numCol="1" anchor="t" anchorCtr="0" compatLnSpc="1">
+            <a:prstTxWarp prst="textNoShape">
+              <a:avLst/>
+            </a:prstTxWarp>
+          </a:bodyPr>
+          <a:lstStyle/>
+          <a:p>
+            <a:endParaRPr lang="en-US"/>
+          </a:p>
+        </p:txBody>
+      </p:sp>
+      <p:sp>
+        <p:nvSpPr>
+          <p:cNvPr id="7" name="AutoShape 4">
+            <a:extLst>
+              <a:ext uri="{FF2B5EF4-FFF2-40B4-BE49-F238E27FC236}">
+                <a16:creationId xmlns:a16="http://schemas.microsoft.com/office/drawing/2014/main" id="{554FC583-0FA9-0709-6639-2B9AC6E64678}"/>
+              </a:ext>
+            </a:extLst>
+          </p:cNvPr>
+          <p:cNvSpPr>
+            <a:spLocks noChangeAspect="1" noChangeArrowheads="1"/>
+          </p:cNvSpPr>
+          <p:nvPr/>
+        </p:nvSpPr>
+        <p:spPr bwMode="auto">
+          <a:xfrm>
+            <a:off x="4572000" y="2571750"/>
+            <a:ext cx="304800" cy="304800"/>
+          </a:xfrm>
+          <a:prstGeom prst="rect">
+            <a:avLst/>
+          </a:prstGeom>
+          <a:noFill/>
+          <a:extLst>
+            <a:ext uri="{909E8E84-426E-40DD-AFC4-6F175D3DCCD1}">
+              <a14:hiddenFill xmlns:a14="http://schemas.microsoft.com/office/drawing/2010/main">
+                <a:solidFill>
+                  <a:srgbClr val="FFFFFF"/>
+                </a:solidFill>
+              </a14:hiddenFill>
+            </a:ext>
+          </a:extLst>
+        </p:spPr>
+        <p:txBody>
+          <a:bodyPr vert="horz" wrap="square" lIns="91440" tIns="45720" rIns="91440" bIns="45720" numCol="1" anchor="t" anchorCtr="0" compatLnSpc="1">
+            <a:prstTxWarp prst="textNoShape">
+              <a:avLst/>
+            </a:prstTxWarp>
+          </a:bodyPr>
+          <a:lstStyle/>
+          <a:p>
+            <a:endParaRPr lang="en-US"/>
           </a:p>
         </p:txBody>
       </p:sp>

--- a/Presentation/Assignment1_Presentation.pptx
+++ b/Presentation/Assignment1_Presentation.pptx
@@ -4427,7 +4427,7 @@
             <a:pPr algn="ctr"/>
             <a:r>
               <a:rPr lang="en-US" sz="3000" b="1" dirty="0"/>
-              <a:t>Cryptographic Vulnerability Discovery</a:t>
+              <a:t>AI- Assisted Cryptographic Vulnerability Discovery</a:t>
             </a:r>
             <a:endParaRPr lang="en-US" sz="3000" dirty="0"/>
           </a:p>
@@ -4469,7 +4469,7 @@
         <p:spPr>
           <a:xfrm>
             <a:off x="228600" y="3181350"/>
-            <a:ext cx="8839200" cy="923330"/>
+            <a:ext cx="8839200" cy="1200329"/>
           </a:xfrm>
           <a:prstGeom prst="rect">
             <a:avLst/>
@@ -4492,15 +4492,14 @@
             <a:pPr algn="ctr"/>
             <a:r>
               <a:rPr lang="en-US" altLang="zh-CN" dirty="0"/>
-              <a:t>Tareq </a:t>
-            </a:r>
-            <a:r>
-              <a:rPr lang="en-US" altLang="zh-CN" dirty="0" err="1"/>
-              <a:t>Alsubaie</a:t>
-            </a:r>
-            <a:r>
-              <a:rPr lang="en-US" altLang="zh-CN" dirty="0"/>
-              <a:t>, Bharathwaj Murali, Peisen Zheng, Nishanth Shanmugasundaram</a:t>
+              <a:t>Tareq Alsubaie, Bharathwaj Murali, Peisen Zheng, Nishanth Shanmugasundaram, </a:t>
+            </a:r>
+            <a:br>
+              <a:rPr lang="en-US" altLang="zh-CN" dirty="0"/>
+            </a:br>
+            <a:r>
+              <a:rPr lang="en-US" altLang="zh-CN" dirty="0"/>
+              <a:t>Shyam Karthick Venkatraman Balakrishnan</a:t>
             </a:r>
           </a:p>
           <a:p>
@@ -4549,11 +4548,11 @@
   <p:clrMapOvr>
     <a:masterClrMapping/>
   </p:clrMapOvr>
-  <mc:AlternateContent xmlns:mc="http://schemas.openxmlformats.org/markup-compatibility/2006">
-    <mc:Choice xmlns:p14="http://schemas.microsoft.com/office/powerpoint/2010/main" Requires="p14">
+  <mc:AlternateContent xmlns:mc="http://schemas.openxmlformats.org/markup-compatibility/2006" xmlns:p14="http://schemas.microsoft.com/office/powerpoint/2010/main">
+    <mc:Choice Requires="p14">
       <p:transition spd="slow" p14:dur="2000" advTm="5116"/>
     </mc:Choice>
-    <mc:Fallback>
+    <mc:Fallback xmlns="">
       <p:transition spd="slow" advTm="5116"/>
     </mc:Fallback>
   </mc:AlternateContent>
